--- a/docs/pptx/auc3/ritu-auc3-linsubhr-egfrdisc-grade3.pptx
+++ b/docs/pptx/auc3/ritu-auc3-linsubhr-egfrdisc-grade3.pptx
@@ -2443,7 +2443,7 @@
           </p:nvSpPr>
           <p:spPr>
             <a:xfrm>
-              <a:off x="2040316" y="2073503"/>
+              <a:off x="2044638" y="2073503"/>
               <a:ext cx="0" cy="3649639"/>
             </a:xfrm>
             <a:custGeom>
@@ -2486,7 +2486,7 @@
           </p:nvSpPr>
           <p:spPr>
             <a:xfrm>
-              <a:off x="4520982" y="2073503"/>
+              <a:off x="4520586" y="2073503"/>
               <a:ext cx="0" cy="3649639"/>
             </a:xfrm>
             <a:custGeom>
@@ -2529,7 +2529,7 @@
           </p:nvSpPr>
           <p:spPr>
             <a:xfrm>
-              <a:off x="7001648" y="2073503"/>
+              <a:off x="6996534" y="2073503"/>
               <a:ext cx="0" cy="3649639"/>
             </a:xfrm>
             <a:custGeom>
@@ -2787,7 +2787,7 @@
           </p:nvSpPr>
           <p:spPr>
             <a:xfrm>
-              <a:off x="3280649" y="2073503"/>
+              <a:off x="3282612" y="2073503"/>
               <a:ext cx="0" cy="3649639"/>
             </a:xfrm>
             <a:custGeom>
@@ -2830,7 +2830,7 @@
           </p:nvSpPr>
           <p:spPr>
             <a:xfrm>
-              <a:off x="5761315" y="2073503"/>
+              <a:off x="5758560" y="2073503"/>
               <a:ext cx="0" cy="3649639"/>
             </a:xfrm>
             <a:custGeom>
@@ -2873,7 +2873,7 @@
           </p:nvSpPr>
           <p:spPr>
             <a:xfrm>
-              <a:off x="8241981" y="2073503"/>
+              <a:off x="8234508" y="2073503"/>
               <a:ext cx="0" cy="3649639"/>
             </a:xfrm>
             <a:custGeom>
@@ -2917,485 +2917,485 @@
           <p:spPr>
             <a:xfrm>
               <a:off x="1172049" y="2073503"/>
-              <a:ext cx="7090630" cy="3401041"/>
+              <a:ext cx="7090630" cy="3400626"/>
             </a:xfrm>
             <a:custGeom>
               <a:avLst/>
               <a:pathLst>
-                <a:path w="7090630" h="3401041">
+                <a:path w="7090630" h="3400626">
                   <a:moveTo>
-                    <a:pt x="3024783" y="0"/>
+                    <a:pt x="3025987" y="0"/>
                   </a:moveTo>
                   <a:lnTo>
-                    <a:pt x="3079768" y="173096"/>
-                  </a:lnTo>
-                  <a:lnTo>
-                    <a:pt x="3151391" y="384192"/>
-                  </a:lnTo>
-                  <a:lnTo>
-                    <a:pt x="3223013" y="581827"/>
-                  </a:lnTo>
-                  <a:lnTo>
-                    <a:pt x="3294636" y="766861"/>
-                  </a:lnTo>
-                  <a:lnTo>
-                    <a:pt x="3366258" y="940096"/>
-                  </a:lnTo>
-                  <a:lnTo>
-                    <a:pt x="3437881" y="1102285"/>
-                  </a:lnTo>
-                  <a:lnTo>
-                    <a:pt x="3509503" y="1254133"/>
-                  </a:lnTo>
-                  <a:lnTo>
-                    <a:pt x="3581126" y="1396299"/>
-                  </a:lnTo>
-                  <a:lnTo>
-                    <a:pt x="3652748" y="1529400"/>
-                  </a:lnTo>
-                  <a:lnTo>
-                    <a:pt x="3724371" y="1654014"/>
-                  </a:lnTo>
-                  <a:lnTo>
-                    <a:pt x="3795993" y="1770682"/>
-                  </a:lnTo>
-                  <a:lnTo>
-                    <a:pt x="3867616" y="1879911"/>
-                  </a:lnTo>
-                  <a:lnTo>
-                    <a:pt x="3939238" y="1982176"/>
-                  </a:lnTo>
-                  <a:lnTo>
-                    <a:pt x="4010861" y="2077920"/>
-                  </a:lnTo>
-                  <a:lnTo>
-                    <a:pt x="4082483" y="2167559"/>
-                  </a:lnTo>
-                  <a:lnTo>
-                    <a:pt x="4154106" y="2251482"/>
-                  </a:lnTo>
-                  <a:lnTo>
-                    <a:pt x="4225729" y="2330054"/>
-                  </a:lnTo>
-                  <a:lnTo>
-                    <a:pt x="4297351" y="2403617"/>
-                  </a:lnTo>
-                  <a:lnTo>
-                    <a:pt x="4368974" y="2472488"/>
-                  </a:lnTo>
-                  <a:lnTo>
-                    <a:pt x="4440596" y="2536969"/>
-                  </a:lnTo>
-                  <a:lnTo>
-                    <a:pt x="4512219" y="2597338"/>
-                  </a:lnTo>
-                  <a:lnTo>
-                    <a:pt x="4583841" y="2653857"/>
-                  </a:lnTo>
-                  <a:lnTo>
-                    <a:pt x="4655464" y="2662796"/>
-                  </a:lnTo>
-                  <a:lnTo>
-                    <a:pt x="4727086" y="2671288"/>
-                  </a:lnTo>
-                  <a:lnTo>
-                    <a:pt x="4798709" y="2679691"/>
-                  </a:lnTo>
-                  <a:lnTo>
-                    <a:pt x="4870331" y="2688008"/>
-                  </a:lnTo>
-                  <a:lnTo>
-                    <a:pt x="4941954" y="2696239"/>
-                  </a:lnTo>
-                  <a:lnTo>
-                    <a:pt x="5013576" y="2704385"/>
-                  </a:lnTo>
-                  <a:lnTo>
-                    <a:pt x="5085199" y="2712446"/>
-                  </a:lnTo>
-                  <a:lnTo>
-                    <a:pt x="5156821" y="2720424"/>
-                  </a:lnTo>
-                  <a:lnTo>
-                    <a:pt x="5228444" y="2728319"/>
-                  </a:lnTo>
-                  <a:lnTo>
-                    <a:pt x="5300066" y="2736133"/>
-                  </a:lnTo>
-                  <a:lnTo>
-                    <a:pt x="5371689" y="2743866"/>
-                  </a:lnTo>
-                  <a:lnTo>
-                    <a:pt x="5443311" y="2751519"/>
-                  </a:lnTo>
-                  <a:lnTo>
-                    <a:pt x="5514934" y="2759093"/>
-                  </a:lnTo>
-                  <a:lnTo>
-                    <a:pt x="5586557" y="2766589"/>
-                  </a:lnTo>
-                  <a:lnTo>
-                    <a:pt x="5658179" y="2774007"/>
-                  </a:lnTo>
-                  <a:lnTo>
-                    <a:pt x="5729802" y="2781348"/>
-                  </a:lnTo>
-                  <a:lnTo>
-                    <a:pt x="5801424" y="2788613"/>
-                  </a:lnTo>
-                  <a:lnTo>
-                    <a:pt x="5873047" y="2795803"/>
-                  </a:lnTo>
-                  <a:lnTo>
-                    <a:pt x="5944669" y="2802919"/>
-                  </a:lnTo>
-                  <a:lnTo>
-                    <a:pt x="6016292" y="2809961"/>
-                  </a:lnTo>
-                  <a:lnTo>
-                    <a:pt x="6087914" y="2816931"/>
-                  </a:lnTo>
-                  <a:lnTo>
-                    <a:pt x="6159537" y="2823828"/>
-                  </a:lnTo>
-                  <a:lnTo>
-                    <a:pt x="6231159" y="2830654"/>
-                  </a:lnTo>
-                  <a:lnTo>
-                    <a:pt x="6302782" y="2837409"/>
-                  </a:lnTo>
-                  <a:lnTo>
-                    <a:pt x="6374404" y="2844095"/>
-                  </a:lnTo>
-                  <a:lnTo>
-                    <a:pt x="6446027" y="2850711"/>
-                  </a:lnTo>
-                  <a:lnTo>
-                    <a:pt x="6517649" y="2857259"/>
-                  </a:lnTo>
-                  <a:lnTo>
-                    <a:pt x="6589272" y="2863739"/>
-                  </a:lnTo>
-                  <a:lnTo>
-                    <a:pt x="6660894" y="2870152"/>
-                  </a:lnTo>
-                  <a:lnTo>
-                    <a:pt x="6732517" y="2876499"/>
-                  </a:lnTo>
-                  <a:lnTo>
-                    <a:pt x="6804139" y="2882780"/>
-                  </a:lnTo>
-                  <a:lnTo>
-                    <a:pt x="6875762" y="2888996"/>
-                  </a:lnTo>
-                  <a:lnTo>
-                    <a:pt x="6947385" y="2895148"/>
-                  </a:lnTo>
-                  <a:lnTo>
-                    <a:pt x="7019007" y="2901236"/>
-                  </a:lnTo>
-                  <a:lnTo>
-                    <a:pt x="7090630" y="2907261"/>
-                  </a:lnTo>
-                  <a:lnTo>
-                    <a:pt x="7090630" y="3401041"/>
-                  </a:lnTo>
-                  <a:lnTo>
-                    <a:pt x="7019007" y="3395409"/>
-                  </a:lnTo>
-                  <a:lnTo>
-                    <a:pt x="6947385" y="3389393"/>
-                  </a:lnTo>
-                  <a:lnTo>
-                    <a:pt x="6875762" y="3382967"/>
-                  </a:lnTo>
-                  <a:lnTo>
-                    <a:pt x="6804139" y="3376103"/>
-                  </a:lnTo>
-                  <a:lnTo>
-                    <a:pt x="6732517" y="3368772"/>
-                  </a:lnTo>
-                  <a:lnTo>
-                    <a:pt x="6660894" y="3360942"/>
-                  </a:lnTo>
-                  <a:lnTo>
-                    <a:pt x="6589272" y="3352578"/>
-                  </a:lnTo>
-                  <a:lnTo>
-                    <a:pt x="6517649" y="3343645"/>
-                  </a:lnTo>
-                  <a:lnTo>
-                    <a:pt x="6446027" y="3334103"/>
-                  </a:lnTo>
-                  <a:lnTo>
-                    <a:pt x="6374404" y="3323912"/>
-                  </a:lnTo>
-                  <a:lnTo>
-                    <a:pt x="6302782" y="3313026"/>
-                  </a:lnTo>
-                  <a:lnTo>
-                    <a:pt x="6231159" y="3301399"/>
-                  </a:lnTo>
-                  <a:lnTo>
-                    <a:pt x="6159537" y="3288981"/>
-                  </a:lnTo>
-                  <a:lnTo>
-                    <a:pt x="6087914" y="3275716"/>
-                  </a:lnTo>
-                  <a:lnTo>
-                    <a:pt x="6016292" y="3261548"/>
-                  </a:lnTo>
-                  <a:lnTo>
-                    <a:pt x="5944669" y="3246415"/>
-                  </a:lnTo>
-                  <a:lnTo>
-                    <a:pt x="5873047" y="3230252"/>
-                  </a:lnTo>
-                  <a:lnTo>
-                    <a:pt x="5801424" y="3212988"/>
-                  </a:lnTo>
-                  <a:lnTo>
-                    <a:pt x="5729802" y="3194547"/>
-                  </a:lnTo>
-                  <a:lnTo>
-                    <a:pt x="5658179" y="3174852"/>
-                  </a:lnTo>
-                  <a:lnTo>
-                    <a:pt x="5586557" y="3153814"/>
-                  </a:lnTo>
-                  <a:lnTo>
-                    <a:pt x="5514934" y="3131344"/>
-                  </a:lnTo>
-                  <a:lnTo>
-                    <a:pt x="5443311" y="3107344"/>
-                  </a:lnTo>
-                  <a:lnTo>
-                    <a:pt x="5371689" y="3081709"/>
-                  </a:lnTo>
-                  <a:lnTo>
-                    <a:pt x="5300066" y="3054328"/>
-                  </a:lnTo>
-                  <a:lnTo>
-                    <a:pt x="5228444" y="3025083"/>
-                  </a:lnTo>
-                  <a:lnTo>
-                    <a:pt x="5156821" y="2993845"/>
-                  </a:lnTo>
-                  <a:lnTo>
-                    <a:pt x="5085199" y="2960481"/>
-                  </a:lnTo>
-                  <a:lnTo>
-                    <a:pt x="5013576" y="2924844"/>
-                  </a:lnTo>
-                  <a:lnTo>
-                    <a:pt x="4941954" y="2886779"/>
-                  </a:lnTo>
-                  <a:lnTo>
-                    <a:pt x="4870331" y="2846123"/>
-                  </a:lnTo>
-                  <a:lnTo>
-                    <a:pt x="4798709" y="2802698"/>
-                  </a:lnTo>
-                  <a:lnTo>
-                    <a:pt x="4727086" y="2756315"/>
-                  </a:lnTo>
-                  <a:lnTo>
-                    <a:pt x="4655464" y="2706773"/>
-                  </a:lnTo>
-                  <a:lnTo>
-                    <a:pt x="4583841" y="2654216"/>
-                  </a:lnTo>
-                  <a:lnTo>
-                    <a:pt x="4512219" y="2645546"/>
-                  </a:lnTo>
-                  <a:lnTo>
-                    <a:pt x="4440596" y="2636785"/>
-                  </a:lnTo>
-                  <a:lnTo>
-                    <a:pt x="4368974" y="2627933"/>
-                  </a:lnTo>
-                  <a:lnTo>
-                    <a:pt x="4297351" y="2618988"/>
-                  </a:lnTo>
-                  <a:lnTo>
-                    <a:pt x="4225729" y="2609950"/>
-                  </a:lnTo>
-                  <a:lnTo>
-                    <a:pt x="4154106" y="2600817"/>
-                  </a:lnTo>
-                  <a:lnTo>
-                    <a:pt x="4082483" y="2591589"/>
-                  </a:lnTo>
-                  <a:lnTo>
-                    <a:pt x="4010861" y="2582265"/>
-                  </a:lnTo>
-                  <a:lnTo>
-                    <a:pt x="3939238" y="2572843"/>
-                  </a:lnTo>
-                  <a:lnTo>
-                    <a:pt x="3867616" y="2563322"/>
-                  </a:lnTo>
-                  <a:lnTo>
-                    <a:pt x="3795993" y="2553702"/>
-                  </a:lnTo>
-                  <a:lnTo>
-                    <a:pt x="3724371" y="2543982"/>
-                  </a:lnTo>
-                  <a:lnTo>
-                    <a:pt x="3652748" y="2534160"/>
-                  </a:lnTo>
-                  <a:lnTo>
-                    <a:pt x="3581126" y="2524235"/>
-                  </a:lnTo>
-                  <a:lnTo>
-                    <a:pt x="3509503" y="2514206"/>
-                  </a:lnTo>
-                  <a:lnTo>
-                    <a:pt x="3437881" y="2504073"/>
-                  </a:lnTo>
-                  <a:lnTo>
-                    <a:pt x="3366258" y="2493834"/>
-                  </a:lnTo>
-                  <a:lnTo>
-                    <a:pt x="3294636" y="2483487"/>
-                  </a:lnTo>
-                  <a:lnTo>
-                    <a:pt x="3223013" y="2473033"/>
-                  </a:lnTo>
-                  <a:lnTo>
-                    <a:pt x="3151391" y="2462469"/>
-                  </a:lnTo>
-                  <a:lnTo>
-                    <a:pt x="3079768" y="2451795"/>
-                  </a:lnTo>
-                  <a:lnTo>
-                    <a:pt x="3008146" y="2441010"/>
-                  </a:lnTo>
-                  <a:lnTo>
-                    <a:pt x="2936523" y="2430111"/>
-                  </a:lnTo>
-                  <a:lnTo>
-                    <a:pt x="2864901" y="2419099"/>
-                  </a:lnTo>
-                  <a:lnTo>
-                    <a:pt x="2793278" y="2407972"/>
-                  </a:lnTo>
-                  <a:lnTo>
-                    <a:pt x="2721655" y="2396728"/>
-                  </a:lnTo>
-                  <a:lnTo>
-                    <a:pt x="2650033" y="2385367"/>
-                  </a:lnTo>
-                  <a:lnTo>
-                    <a:pt x="2578410" y="2373887"/>
-                  </a:lnTo>
-                  <a:lnTo>
-                    <a:pt x="2506788" y="2362287"/>
-                  </a:lnTo>
-                  <a:lnTo>
-                    <a:pt x="2435165" y="2350566"/>
-                  </a:lnTo>
-                  <a:lnTo>
-                    <a:pt x="2363543" y="2338722"/>
-                  </a:lnTo>
-                  <a:lnTo>
-                    <a:pt x="2291920" y="2326755"/>
-                  </a:lnTo>
-                  <a:lnTo>
-                    <a:pt x="2220298" y="2314662"/>
-                  </a:lnTo>
-                  <a:lnTo>
-                    <a:pt x="2148675" y="2302443"/>
-                  </a:lnTo>
-                  <a:lnTo>
-                    <a:pt x="2077053" y="2290097"/>
-                  </a:lnTo>
-                  <a:lnTo>
-                    <a:pt x="2005430" y="2277621"/>
-                  </a:lnTo>
-                  <a:lnTo>
-                    <a:pt x="1933808" y="2265015"/>
-                  </a:lnTo>
-                  <a:lnTo>
-                    <a:pt x="1862185" y="2252277"/>
-                  </a:lnTo>
-                  <a:lnTo>
-                    <a:pt x="1790563" y="2239406"/>
-                  </a:lnTo>
-                  <a:lnTo>
-                    <a:pt x="1718940" y="2226401"/>
-                  </a:lnTo>
-                  <a:lnTo>
-                    <a:pt x="1647318" y="2213259"/>
-                  </a:lnTo>
-                  <a:lnTo>
-                    <a:pt x="1575695" y="2199981"/>
-                  </a:lnTo>
-                  <a:lnTo>
-                    <a:pt x="1504073" y="2186563"/>
-                  </a:lnTo>
-                  <a:lnTo>
-                    <a:pt x="1432450" y="2173005"/>
-                  </a:lnTo>
-                  <a:lnTo>
-                    <a:pt x="1360827" y="2159306"/>
-                  </a:lnTo>
-                  <a:lnTo>
-                    <a:pt x="1289205" y="2145463"/>
-                  </a:lnTo>
-                  <a:lnTo>
-                    <a:pt x="1217582" y="2131476"/>
-                  </a:lnTo>
-                  <a:lnTo>
-                    <a:pt x="1145960" y="2117343"/>
-                  </a:lnTo>
-                  <a:lnTo>
-                    <a:pt x="1074337" y="2103061"/>
-                  </a:lnTo>
-                  <a:lnTo>
-                    <a:pt x="1002715" y="2088631"/>
-                  </a:lnTo>
-                  <a:lnTo>
-                    <a:pt x="931092" y="2074050"/>
-                  </a:lnTo>
-                  <a:lnTo>
-                    <a:pt x="859470" y="2059316"/>
-                  </a:lnTo>
-                  <a:lnTo>
-                    <a:pt x="787847" y="2044428"/>
-                  </a:lnTo>
-                  <a:lnTo>
-                    <a:pt x="716225" y="2029385"/>
-                  </a:lnTo>
-                  <a:lnTo>
-                    <a:pt x="644602" y="2014184"/>
-                  </a:lnTo>
-                  <a:lnTo>
-                    <a:pt x="572980" y="1998825"/>
-                  </a:lnTo>
-                  <a:lnTo>
-                    <a:pt x="501357" y="1983305"/>
-                  </a:lnTo>
-                  <a:lnTo>
-                    <a:pt x="429735" y="1967623"/>
-                  </a:lnTo>
-                  <a:lnTo>
-                    <a:pt x="358112" y="1951777"/>
-                  </a:lnTo>
-                  <a:lnTo>
-                    <a:pt x="286490" y="1935765"/>
-                  </a:lnTo>
-                  <a:lnTo>
-                    <a:pt x="214867" y="1919586"/>
-                  </a:lnTo>
-                  <a:lnTo>
-                    <a:pt x="143245" y="1903238"/>
-                  </a:lnTo>
-                  <a:lnTo>
-                    <a:pt x="71622" y="1886719"/>
-                  </a:lnTo>
-                  <a:lnTo>
-                    <a:pt x="0" y="1870027"/>
+                    <a:pt x="3079768" y="169315"/>
+                  </a:lnTo>
+                  <a:lnTo>
+                    <a:pt x="3151391" y="380437"/>
+                  </a:lnTo>
+                  <a:lnTo>
+                    <a:pt x="3223013" y="578111"/>
+                  </a:lnTo>
+                  <a:lnTo>
+                    <a:pt x="3294636" y="763193"/>
+                  </a:lnTo>
+                  <a:lnTo>
+                    <a:pt x="3366258" y="936487"/>
+                  </a:lnTo>
+                  <a:lnTo>
+                    <a:pt x="3437881" y="1098741"/>
+                  </a:lnTo>
+                  <a:lnTo>
+                    <a:pt x="3509503" y="1250661"/>
+                  </a:lnTo>
+                  <a:lnTo>
+                    <a:pt x="3581126" y="1392903"/>
+                  </a:lnTo>
+                  <a:lnTo>
+                    <a:pt x="3652748" y="1526085"/>
+                  </a:lnTo>
+                  <a:lnTo>
+                    <a:pt x="3724371" y="1650784"/>
+                  </a:lnTo>
+                  <a:lnTo>
+                    <a:pt x="3795993" y="1767540"/>
+                  </a:lnTo>
+                  <a:lnTo>
+                    <a:pt x="3867616" y="1876858"/>
+                  </a:lnTo>
+                  <a:lnTo>
+                    <a:pt x="3939238" y="1979213"/>
+                  </a:lnTo>
+                  <a:lnTo>
+                    <a:pt x="4010861" y="2075049"/>
+                  </a:lnTo>
+                  <a:lnTo>
+                    <a:pt x="4082483" y="2164780"/>
+                  </a:lnTo>
+                  <a:lnTo>
+                    <a:pt x="4154106" y="2248795"/>
+                  </a:lnTo>
+                  <a:lnTo>
+                    <a:pt x="4225729" y="2327458"/>
+                  </a:lnTo>
+                  <a:lnTo>
+                    <a:pt x="4297351" y="2401111"/>
+                  </a:lnTo>
+                  <a:lnTo>
+                    <a:pt x="4368974" y="2470073"/>
+                  </a:lnTo>
+                  <a:lnTo>
+                    <a:pt x="4440596" y="2534642"/>
+                  </a:lnTo>
+                  <a:lnTo>
+                    <a:pt x="4512219" y="2595097"/>
+                  </a:lnTo>
+                  <a:lnTo>
+                    <a:pt x="4583841" y="2651702"/>
+                  </a:lnTo>
+                  <a:lnTo>
+                    <a:pt x="4655464" y="2662310"/>
+                  </a:lnTo>
+                  <a:lnTo>
+                    <a:pt x="4727086" y="2670652"/>
+                  </a:lnTo>
+                  <a:lnTo>
+                    <a:pt x="4798709" y="2678908"/>
+                  </a:lnTo>
+                  <a:lnTo>
+                    <a:pt x="4870331" y="2687081"/>
+                  </a:lnTo>
+                  <a:lnTo>
+                    <a:pt x="4941954" y="2695171"/>
+                  </a:lnTo>
+                  <a:lnTo>
+                    <a:pt x="5013576" y="2703179"/>
+                  </a:lnTo>
+                  <a:lnTo>
+                    <a:pt x="5085199" y="2711105"/>
+                  </a:lnTo>
+                  <a:lnTo>
+                    <a:pt x="5156821" y="2718951"/>
+                  </a:lnTo>
+                  <a:lnTo>
+                    <a:pt x="5228444" y="2726717"/>
+                  </a:lnTo>
+                  <a:lnTo>
+                    <a:pt x="5300066" y="2734405"/>
+                  </a:lnTo>
+                  <a:lnTo>
+                    <a:pt x="5371689" y="2742014"/>
+                  </a:lnTo>
+                  <a:lnTo>
+                    <a:pt x="5443311" y="2749546"/>
+                  </a:lnTo>
+                  <a:lnTo>
+                    <a:pt x="5514934" y="2757001"/>
+                  </a:lnTo>
+                  <a:lnTo>
+                    <a:pt x="5586557" y="2764381"/>
+                  </a:lnTo>
+                  <a:lnTo>
+                    <a:pt x="5658179" y="2771686"/>
+                  </a:lnTo>
+                  <a:lnTo>
+                    <a:pt x="5729802" y="2778917"/>
+                  </a:lnTo>
+                  <a:lnTo>
+                    <a:pt x="5801424" y="2786074"/>
+                  </a:lnTo>
+                  <a:lnTo>
+                    <a:pt x="5873047" y="2793159"/>
+                  </a:lnTo>
+                  <a:lnTo>
+                    <a:pt x="5944669" y="2800171"/>
+                  </a:lnTo>
+                  <a:lnTo>
+                    <a:pt x="6016292" y="2807113"/>
+                  </a:lnTo>
+                  <a:lnTo>
+                    <a:pt x="6087914" y="2813984"/>
+                  </a:lnTo>
+                  <a:lnTo>
+                    <a:pt x="6159537" y="2820785"/>
+                  </a:lnTo>
+                  <a:lnTo>
+                    <a:pt x="6231159" y="2827517"/>
+                  </a:lnTo>
+                  <a:lnTo>
+                    <a:pt x="6302782" y="2834181"/>
+                  </a:lnTo>
+                  <a:lnTo>
+                    <a:pt x="6374404" y="2840777"/>
+                  </a:lnTo>
+                  <a:lnTo>
+                    <a:pt x="6446027" y="2847306"/>
+                  </a:lnTo>
+                  <a:lnTo>
+                    <a:pt x="6517649" y="2853769"/>
+                  </a:lnTo>
+                  <a:lnTo>
+                    <a:pt x="6589272" y="2860166"/>
+                  </a:lnTo>
+                  <a:lnTo>
+                    <a:pt x="6660894" y="2866498"/>
+                  </a:lnTo>
+                  <a:lnTo>
+                    <a:pt x="6732517" y="2872766"/>
+                  </a:lnTo>
+                  <a:lnTo>
+                    <a:pt x="6804139" y="2878971"/>
+                  </a:lnTo>
+                  <a:lnTo>
+                    <a:pt x="6875762" y="2885112"/>
+                  </a:lnTo>
+                  <a:lnTo>
+                    <a:pt x="6947385" y="2891191"/>
+                  </a:lnTo>
+                  <a:lnTo>
+                    <a:pt x="7019007" y="2897208"/>
+                  </a:lnTo>
+                  <a:lnTo>
+                    <a:pt x="7090630" y="2903164"/>
+                  </a:lnTo>
+                  <a:lnTo>
+                    <a:pt x="7090630" y="3400626"/>
+                  </a:lnTo>
+                  <a:lnTo>
+                    <a:pt x="7019007" y="3394971"/>
+                  </a:lnTo>
+                  <a:lnTo>
+                    <a:pt x="6947385" y="3388932"/>
+                  </a:lnTo>
+                  <a:lnTo>
+                    <a:pt x="6875762" y="3382481"/>
+                  </a:lnTo>
+                  <a:lnTo>
+                    <a:pt x="6804139" y="3375592"/>
+                  </a:lnTo>
+                  <a:lnTo>
+                    <a:pt x="6732517" y="3368234"/>
+                  </a:lnTo>
+                  <a:lnTo>
+                    <a:pt x="6660894" y="3360376"/>
+                  </a:lnTo>
+                  <a:lnTo>
+                    <a:pt x="6589272" y="3351983"/>
+                  </a:lnTo>
+                  <a:lnTo>
+                    <a:pt x="6517649" y="3343019"/>
+                  </a:lnTo>
+                  <a:lnTo>
+                    <a:pt x="6446027" y="3333445"/>
+                  </a:lnTo>
+                  <a:lnTo>
+                    <a:pt x="6374404" y="3323219"/>
+                  </a:lnTo>
+                  <a:lnTo>
+                    <a:pt x="6302782" y="3312299"/>
+                  </a:lnTo>
+                  <a:lnTo>
+                    <a:pt x="6231159" y="3300635"/>
+                  </a:lnTo>
+                  <a:lnTo>
+                    <a:pt x="6159537" y="3288178"/>
+                  </a:lnTo>
+                  <a:lnTo>
+                    <a:pt x="6087914" y="3274873"/>
+                  </a:lnTo>
+                  <a:lnTo>
+                    <a:pt x="6016292" y="3260663"/>
+                  </a:lnTo>
+                  <a:lnTo>
+                    <a:pt x="5944669" y="3245486"/>
+                  </a:lnTo>
+                  <a:lnTo>
+                    <a:pt x="5873047" y="3229277"/>
+                  </a:lnTo>
+                  <a:lnTo>
+                    <a:pt x="5801424" y="3211965"/>
+                  </a:lnTo>
+                  <a:lnTo>
+                    <a:pt x="5729802" y="3193476"/>
+                  </a:lnTo>
+                  <a:lnTo>
+                    <a:pt x="5658179" y="3173728"/>
+                  </a:lnTo>
+                  <a:lnTo>
+                    <a:pt x="5586557" y="3152637"/>
+                  </a:lnTo>
+                  <a:lnTo>
+                    <a:pt x="5514934" y="3130112"/>
+                  </a:lnTo>
+                  <a:lnTo>
+                    <a:pt x="5443311" y="3106053"/>
+                  </a:lnTo>
+                  <a:lnTo>
+                    <a:pt x="5371689" y="3080358"/>
+                  </a:lnTo>
+                  <a:lnTo>
+                    <a:pt x="5300066" y="3052915"/>
+                  </a:lnTo>
+                  <a:lnTo>
+                    <a:pt x="5228444" y="3023605"/>
+                  </a:lnTo>
+                  <a:lnTo>
+                    <a:pt x="5156821" y="2992302"/>
+                  </a:lnTo>
+                  <a:lnTo>
+                    <a:pt x="5085199" y="2958868"/>
+                  </a:lnTo>
+                  <a:lnTo>
+                    <a:pt x="5013576" y="2923160"/>
+                  </a:lnTo>
+                  <a:lnTo>
+                    <a:pt x="4941954" y="2885022"/>
+                  </a:lnTo>
+                  <a:lnTo>
+                    <a:pt x="4870331" y="2844291"/>
+                  </a:lnTo>
+                  <a:lnTo>
+                    <a:pt x="4798709" y="2800788"/>
+                  </a:lnTo>
+                  <a:lnTo>
+                    <a:pt x="4727086" y="2754325"/>
+                  </a:lnTo>
+                  <a:lnTo>
+                    <a:pt x="4655464" y="2704702"/>
+                  </a:lnTo>
+                  <a:lnTo>
+                    <a:pt x="4583841" y="2653883"/>
+                  </a:lnTo>
+                  <a:lnTo>
+                    <a:pt x="4512219" y="2645370"/>
+                  </a:lnTo>
+                  <a:lnTo>
+                    <a:pt x="4440596" y="2636769"/>
+                  </a:lnTo>
+                  <a:lnTo>
+                    <a:pt x="4368974" y="2628080"/>
+                  </a:lnTo>
+                  <a:lnTo>
+                    <a:pt x="4297351" y="2619302"/>
+                  </a:lnTo>
+                  <a:lnTo>
+                    <a:pt x="4225729" y="2610434"/>
+                  </a:lnTo>
+                  <a:lnTo>
+                    <a:pt x="4154106" y="2601475"/>
+                  </a:lnTo>
+                  <a:lnTo>
+                    <a:pt x="4082483" y="2592424"/>
+                  </a:lnTo>
+                  <a:lnTo>
+                    <a:pt x="4010861" y="2583280"/>
+                  </a:lnTo>
+                  <a:lnTo>
+                    <a:pt x="3939238" y="2574042"/>
+                  </a:lnTo>
+                  <a:lnTo>
+                    <a:pt x="3867616" y="2564709"/>
+                  </a:lnTo>
+                  <a:lnTo>
+                    <a:pt x="3795993" y="2555281"/>
+                  </a:lnTo>
+                  <a:lnTo>
+                    <a:pt x="3724371" y="2545756"/>
+                  </a:lnTo>
+                  <a:lnTo>
+                    <a:pt x="3652748" y="2536134"/>
+                  </a:lnTo>
+                  <a:lnTo>
+                    <a:pt x="3581126" y="2526412"/>
+                  </a:lnTo>
+                  <a:lnTo>
+                    <a:pt x="3509503" y="2516591"/>
+                  </a:lnTo>
+                  <a:lnTo>
+                    <a:pt x="3437881" y="2506669"/>
+                  </a:lnTo>
+                  <a:lnTo>
+                    <a:pt x="3366258" y="2496646"/>
+                  </a:lnTo>
+                  <a:lnTo>
+                    <a:pt x="3294636" y="2486519"/>
+                  </a:lnTo>
+                  <a:lnTo>
+                    <a:pt x="3223013" y="2476289"/>
+                  </a:lnTo>
+                  <a:lnTo>
+                    <a:pt x="3151391" y="2465953"/>
+                  </a:lnTo>
+                  <a:lnTo>
+                    <a:pt x="3079768" y="2455512"/>
+                  </a:lnTo>
+                  <a:lnTo>
+                    <a:pt x="3008146" y="2444964"/>
+                  </a:lnTo>
+                  <a:lnTo>
+                    <a:pt x="2936523" y="2434307"/>
+                  </a:lnTo>
+                  <a:lnTo>
+                    <a:pt x="2864901" y="2423541"/>
+                  </a:lnTo>
+                  <a:lnTo>
+                    <a:pt x="2793278" y="2412664"/>
+                  </a:lnTo>
+                  <a:lnTo>
+                    <a:pt x="2721655" y="2401676"/>
+                  </a:lnTo>
+                  <a:lnTo>
+                    <a:pt x="2650033" y="2390576"/>
+                  </a:lnTo>
+                  <a:lnTo>
+                    <a:pt x="2578410" y="2379361"/>
+                  </a:lnTo>
+                  <a:lnTo>
+                    <a:pt x="2506788" y="2368031"/>
+                  </a:lnTo>
+                  <a:lnTo>
+                    <a:pt x="2435165" y="2356585"/>
+                  </a:lnTo>
+                  <a:lnTo>
+                    <a:pt x="2363543" y="2345022"/>
+                  </a:lnTo>
+                  <a:lnTo>
+                    <a:pt x="2291920" y="2333340"/>
+                  </a:lnTo>
+                  <a:lnTo>
+                    <a:pt x="2220298" y="2321538"/>
+                  </a:lnTo>
+                  <a:lnTo>
+                    <a:pt x="2148675" y="2309615"/>
+                  </a:lnTo>
+                  <a:lnTo>
+                    <a:pt x="2077053" y="2297570"/>
+                  </a:lnTo>
+                  <a:lnTo>
+                    <a:pt x="2005430" y="2285401"/>
+                  </a:lnTo>
+                  <a:lnTo>
+                    <a:pt x="1933808" y="2273108"/>
+                  </a:lnTo>
+                  <a:lnTo>
+                    <a:pt x="1862185" y="2260688"/>
+                  </a:lnTo>
+                  <a:lnTo>
+                    <a:pt x="1790563" y="2248141"/>
+                  </a:lnTo>
+                  <a:lnTo>
+                    <a:pt x="1718940" y="2235465"/>
+                  </a:lnTo>
+                  <a:lnTo>
+                    <a:pt x="1647318" y="2222659"/>
+                  </a:lnTo>
+                  <a:lnTo>
+                    <a:pt x="1575695" y="2209722"/>
+                  </a:lnTo>
+                  <a:lnTo>
+                    <a:pt x="1504073" y="2196652"/>
+                  </a:lnTo>
+                  <a:lnTo>
+                    <a:pt x="1432450" y="2183448"/>
+                  </a:lnTo>
+                  <a:lnTo>
+                    <a:pt x="1360827" y="2170109"/>
+                  </a:lnTo>
+                  <a:lnTo>
+                    <a:pt x="1289205" y="2156632"/>
+                  </a:lnTo>
+                  <a:lnTo>
+                    <a:pt x="1217582" y="2143018"/>
+                  </a:lnTo>
+                  <a:lnTo>
+                    <a:pt x="1145960" y="2129263"/>
+                  </a:lnTo>
+                  <a:lnTo>
+                    <a:pt x="1074337" y="2115368"/>
+                  </a:lnTo>
+                  <a:lnTo>
+                    <a:pt x="1002715" y="2101330"/>
+                  </a:lnTo>
+                  <a:lnTo>
+                    <a:pt x="931092" y="2087148"/>
+                  </a:lnTo>
+                  <a:lnTo>
+                    <a:pt x="859470" y="2072821"/>
+                  </a:lnTo>
+                  <a:lnTo>
+                    <a:pt x="787847" y="2058346"/>
+                  </a:lnTo>
+                  <a:lnTo>
+                    <a:pt x="716225" y="2043723"/>
+                  </a:lnTo>
+                  <a:lnTo>
+                    <a:pt x="644602" y="2028950"/>
+                  </a:lnTo>
+                  <a:lnTo>
+                    <a:pt x="572980" y="2014026"/>
+                  </a:lnTo>
+                  <a:lnTo>
+                    <a:pt x="501357" y="1998948"/>
+                  </a:lnTo>
+                  <a:lnTo>
+                    <a:pt x="429735" y="1983716"/>
+                  </a:lnTo>
+                  <a:lnTo>
+                    <a:pt x="358112" y="1968327"/>
+                  </a:lnTo>
+                  <a:lnTo>
+                    <a:pt x="286490" y="1952781"/>
+                  </a:lnTo>
+                  <a:lnTo>
+                    <a:pt x="214867" y="1937075"/>
+                  </a:lnTo>
+                  <a:lnTo>
+                    <a:pt x="143245" y="1921208"/>
+                  </a:lnTo>
+                  <a:lnTo>
+                    <a:pt x="71622" y="1905178"/>
+                  </a:lnTo>
+                  <a:lnTo>
+                    <a:pt x="0" y="1888984"/>
                   </a:lnTo>
                   <a:lnTo>
                     <a:pt x="0" y="0"/>
@@ -3424,186 +3424,186 @@
           </p:nvSpPr>
           <p:spPr>
             <a:xfrm>
-              <a:off x="4196832" y="2073503"/>
-              <a:ext cx="4065846" cy="2907261"/>
+              <a:off x="4198036" y="2073503"/>
+              <a:ext cx="4064642" cy="2903164"/>
             </a:xfrm>
             <a:custGeom>
               <a:avLst/>
               <a:pathLst>
-                <a:path w="4065846" h="2907261">
+                <a:path w="4064642" h="2903164">
                   <a:moveTo>
                     <a:pt x="0" y="0"/>
                   </a:moveTo>
                   <a:lnTo>
-                    <a:pt x="54985" y="173096"/>
-                  </a:lnTo>
-                  <a:lnTo>
-                    <a:pt x="126607" y="384192"/>
-                  </a:lnTo>
-                  <a:lnTo>
-                    <a:pt x="198230" y="581827"/>
-                  </a:lnTo>
-                  <a:lnTo>
-                    <a:pt x="269852" y="766861"/>
-                  </a:lnTo>
-                  <a:lnTo>
-                    <a:pt x="341475" y="940096"/>
-                  </a:lnTo>
-                  <a:lnTo>
-                    <a:pt x="413097" y="1102285"/>
-                  </a:lnTo>
-                  <a:lnTo>
-                    <a:pt x="484720" y="1254133"/>
-                  </a:lnTo>
-                  <a:lnTo>
-                    <a:pt x="556342" y="1396299"/>
-                  </a:lnTo>
-                  <a:lnTo>
-                    <a:pt x="627965" y="1529400"/>
-                  </a:lnTo>
-                  <a:lnTo>
-                    <a:pt x="699587" y="1654014"/>
-                  </a:lnTo>
-                  <a:lnTo>
-                    <a:pt x="771210" y="1770682"/>
-                  </a:lnTo>
-                  <a:lnTo>
-                    <a:pt x="842833" y="1879911"/>
-                  </a:lnTo>
-                  <a:lnTo>
-                    <a:pt x="914455" y="1982176"/>
-                  </a:lnTo>
-                  <a:lnTo>
-                    <a:pt x="986078" y="2077920"/>
-                  </a:lnTo>
-                  <a:lnTo>
-                    <a:pt x="1057700" y="2167559"/>
-                  </a:lnTo>
-                  <a:lnTo>
-                    <a:pt x="1129323" y="2251482"/>
-                  </a:lnTo>
-                  <a:lnTo>
-                    <a:pt x="1200945" y="2330054"/>
-                  </a:lnTo>
-                  <a:lnTo>
-                    <a:pt x="1272568" y="2403617"/>
-                  </a:lnTo>
-                  <a:lnTo>
-                    <a:pt x="1344190" y="2472488"/>
-                  </a:lnTo>
-                  <a:lnTo>
-                    <a:pt x="1415813" y="2536969"/>
-                  </a:lnTo>
-                  <a:lnTo>
-                    <a:pt x="1487435" y="2597338"/>
-                  </a:lnTo>
-                  <a:lnTo>
-                    <a:pt x="1559058" y="2653857"/>
-                  </a:lnTo>
-                  <a:lnTo>
-                    <a:pt x="1630680" y="2662796"/>
-                  </a:lnTo>
-                  <a:lnTo>
-                    <a:pt x="1702303" y="2671288"/>
-                  </a:lnTo>
-                  <a:lnTo>
-                    <a:pt x="1773925" y="2679691"/>
-                  </a:lnTo>
-                  <a:lnTo>
-                    <a:pt x="1845548" y="2688008"/>
-                  </a:lnTo>
-                  <a:lnTo>
-                    <a:pt x="1917170" y="2696239"/>
-                  </a:lnTo>
-                  <a:lnTo>
-                    <a:pt x="1988793" y="2704385"/>
-                  </a:lnTo>
-                  <a:lnTo>
-                    <a:pt x="2060415" y="2712446"/>
-                  </a:lnTo>
-                  <a:lnTo>
-                    <a:pt x="2132038" y="2720424"/>
-                  </a:lnTo>
-                  <a:lnTo>
-                    <a:pt x="2203661" y="2728319"/>
-                  </a:lnTo>
-                  <a:lnTo>
-                    <a:pt x="2275283" y="2736133"/>
-                  </a:lnTo>
-                  <a:lnTo>
-                    <a:pt x="2346906" y="2743866"/>
-                  </a:lnTo>
-                  <a:lnTo>
-                    <a:pt x="2418528" y="2751519"/>
-                  </a:lnTo>
-                  <a:lnTo>
-                    <a:pt x="2490151" y="2759093"/>
-                  </a:lnTo>
-                  <a:lnTo>
-                    <a:pt x="2561773" y="2766589"/>
-                  </a:lnTo>
-                  <a:lnTo>
-                    <a:pt x="2633396" y="2774007"/>
-                  </a:lnTo>
-                  <a:lnTo>
-                    <a:pt x="2705018" y="2781348"/>
-                  </a:lnTo>
-                  <a:lnTo>
-                    <a:pt x="2776641" y="2788613"/>
-                  </a:lnTo>
-                  <a:lnTo>
-                    <a:pt x="2848263" y="2795803"/>
-                  </a:lnTo>
-                  <a:lnTo>
-                    <a:pt x="2919886" y="2802919"/>
-                  </a:lnTo>
-                  <a:lnTo>
-                    <a:pt x="2991508" y="2809961"/>
-                  </a:lnTo>
-                  <a:lnTo>
-                    <a:pt x="3063131" y="2816931"/>
-                  </a:lnTo>
-                  <a:lnTo>
-                    <a:pt x="3134753" y="2823828"/>
-                  </a:lnTo>
-                  <a:lnTo>
-                    <a:pt x="3206376" y="2830654"/>
-                  </a:lnTo>
-                  <a:lnTo>
-                    <a:pt x="3277998" y="2837409"/>
-                  </a:lnTo>
-                  <a:lnTo>
-                    <a:pt x="3349621" y="2844095"/>
-                  </a:lnTo>
-                  <a:lnTo>
-                    <a:pt x="3421243" y="2850711"/>
-                  </a:lnTo>
-                  <a:lnTo>
-                    <a:pt x="3492866" y="2857259"/>
-                  </a:lnTo>
-                  <a:lnTo>
-                    <a:pt x="3564489" y="2863739"/>
-                  </a:lnTo>
-                  <a:lnTo>
-                    <a:pt x="3636111" y="2870152"/>
-                  </a:lnTo>
-                  <a:lnTo>
-                    <a:pt x="3707734" y="2876499"/>
-                  </a:lnTo>
-                  <a:lnTo>
-                    <a:pt x="3779356" y="2882780"/>
-                  </a:lnTo>
-                  <a:lnTo>
-                    <a:pt x="3850979" y="2888996"/>
-                  </a:lnTo>
-                  <a:lnTo>
-                    <a:pt x="3922601" y="2895148"/>
-                  </a:lnTo>
-                  <a:lnTo>
-                    <a:pt x="3994224" y="2901236"/>
-                  </a:lnTo>
-                  <a:lnTo>
-                    <a:pt x="4065846" y="2907261"/>
+                    <a:pt x="53781" y="169315"/>
+                  </a:lnTo>
+                  <a:lnTo>
+                    <a:pt x="125403" y="380437"/>
+                  </a:lnTo>
+                  <a:lnTo>
+                    <a:pt x="197026" y="578111"/>
+                  </a:lnTo>
+                  <a:lnTo>
+                    <a:pt x="268648" y="763193"/>
+                  </a:lnTo>
+                  <a:lnTo>
+                    <a:pt x="340271" y="936487"/>
+                  </a:lnTo>
+                  <a:lnTo>
+                    <a:pt x="411893" y="1098741"/>
+                  </a:lnTo>
+                  <a:lnTo>
+                    <a:pt x="483516" y="1250661"/>
+                  </a:lnTo>
+                  <a:lnTo>
+                    <a:pt x="555138" y="1392903"/>
+                  </a:lnTo>
+                  <a:lnTo>
+                    <a:pt x="626761" y="1526085"/>
+                  </a:lnTo>
+                  <a:lnTo>
+                    <a:pt x="698383" y="1650784"/>
+                  </a:lnTo>
+                  <a:lnTo>
+                    <a:pt x="770006" y="1767540"/>
+                  </a:lnTo>
+                  <a:lnTo>
+                    <a:pt x="841628" y="1876858"/>
+                  </a:lnTo>
+                  <a:lnTo>
+                    <a:pt x="913251" y="1979213"/>
+                  </a:lnTo>
+                  <a:lnTo>
+                    <a:pt x="984873" y="2075049"/>
+                  </a:lnTo>
+                  <a:lnTo>
+                    <a:pt x="1056496" y="2164780"/>
+                  </a:lnTo>
+                  <a:lnTo>
+                    <a:pt x="1128119" y="2248795"/>
+                  </a:lnTo>
+                  <a:lnTo>
+                    <a:pt x="1199741" y="2327458"/>
+                  </a:lnTo>
+                  <a:lnTo>
+                    <a:pt x="1271364" y="2401111"/>
+                  </a:lnTo>
+                  <a:lnTo>
+                    <a:pt x="1342986" y="2470073"/>
+                  </a:lnTo>
+                  <a:lnTo>
+                    <a:pt x="1414609" y="2534642"/>
+                  </a:lnTo>
+                  <a:lnTo>
+                    <a:pt x="1486231" y="2595097"/>
+                  </a:lnTo>
+                  <a:lnTo>
+                    <a:pt x="1557854" y="2651702"/>
+                  </a:lnTo>
+                  <a:lnTo>
+                    <a:pt x="1629476" y="2662310"/>
+                  </a:lnTo>
+                  <a:lnTo>
+                    <a:pt x="1701099" y="2670652"/>
+                  </a:lnTo>
+                  <a:lnTo>
+                    <a:pt x="1772721" y="2678908"/>
+                  </a:lnTo>
+                  <a:lnTo>
+                    <a:pt x="1844344" y="2687081"/>
+                  </a:lnTo>
+                  <a:lnTo>
+                    <a:pt x="1915966" y="2695171"/>
+                  </a:lnTo>
+                  <a:lnTo>
+                    <a:pt x="1987589" y="2703179"/>
+                  </a:lnTo>
+                  <a:lnTo>
+                    <a:pt x="2059211" y="2711105"/>
+                  </a:lnTo>
+                  <a:lnTo>
+                    <a:pt x="2130834" y="2718951"/>
+                  </a:lnTo>
+                  <a:lnTo>
+                    <a:pt x="2202456" y="2726717"/>
+                  </a:lnTo>
+                  <a:lnTo>
+                    <a:pt x="2274079" y="2734405"/>
+                  </a:lnTo>
+                  <a:lnTo>
+                    <a:pt x="2345701" y="2742014"/>
+                  </a:lnTo>
+                  <a:lnTo>
+                    <a:pt x="2417324" y="2749546"/>
+                  </a:lnTo>
+                  <a:lnTo>
+                    <a:pt x="2488947" y="2757001"/>
+                  </a:lnTo>
+                  <a:lnTo>
+                    <a:pt x="2560569" y="2764381"/>
+                  </a:lnTo>
+                  <a:lnTo>
+                    <a:pt x="2632192" y="2771686"/>
+                  </a:lnTo>
+                  <a:lnTo>
+                    <a:pt x="2703814" y="2778917"/>
+                  </a:lnTo>
+                  <a:lnTo>
+                    <a:pt x="2775437" y="2786074"/>
+                  </a:lnTo>
+                  <a:lnTo>
+                    <a:pt x="2847059" y="2793159"/>
+                  </a:lnTo>
+                  <a:lnTo>
+                    <a:pt x="2918682" y="2800171"/>
+                  </a:lnTo>
+                  <a:lnTo>
+                    <a:pt x="2990304" y="2807113"/>
+                  </a:lnTo>
+                  <a:lnTo>
+                    <a:pt x="3061927" y="2813984"/>
+                  </a:lnTo>
+                  <a:lnTo>
+                    <a:pt x="3133549" y="2820785"/>
+                  </a:lnTo>
+                  <a:lnTo>
+                    <a:pt x="3205172" y="2827517"/>
+                  </a:lnTo>
+                  <a:lnTo>
+                    <a:pt x="3276794" y="2834181"/>
+                  </a:lnTo>
+                  <a:lnTo>
+                    <a:pt x="3348417" y="2840777"/>
+                  </a:lnTo>
+                  <a:lnTo>
+                    <a:pt x="3420039" y="2847306"/>
+                  </a:lnTo>
+                  <a:lnTo>
+                    <a:pt x="3491662" y="2853769"/>
+                  </a:lnTo>
+                  <a:lnTo>
+                    <a:pt x="3563284" y="2860166"/>
+                  </a:lnTo>
+                  <a:lnTo>
+                    <a:pt x="3634907" y="2866498"/>
+                  </a:lnTo>
+                  <a:lnTo>
+                    <a:pt x="3706529" y="2872766"/>
+                  </a:lnTo>
+                  <a:lnTo>
+                    <a:pt x="3778152" y="2878971"/>
+                  </a:lnTo>
+                  <a:lnTo>
+                    <a:pt x="3849775" y="2885112"/>
+                  </a:lnTo>
+                  <a:lnTo>
+                    <a:pt x="3921397" y="2891191"/>
+                  </a:lnTo>
+                  <a:lnTo>
+                    <a:pt x="3993020" y="2897208"/>
+                  </a:lnTo>
+                  <a:lnTo>
+                    <a:pt x="4064642" y="2903164"/>
                   </a:lnTo>
                 </a:path>
               </a:pathLst>
@@ -3623,309 +3623,309 @@
           </p:nvSpPr>
           <p:spPr>
             <a:xfrm>
-              <a:off x="1172049" y="3943530"/>
-              <a:ext cx="7090630" cy="1531014"/>
+              <a:off x="1172049" y="3962487"/>
+              <a:ext cx="7090630" cy="1511641"/>
             </a:xfrm>
             <a:custGeom>
               <a:avLst/>
               <a:pathLst>
-                <a:path w="7090630" h="1531014">
+                <a:path w="7090630" h="1511641">
                   <a:moveTo>
-                    <a:pt x="7090630" y="1531014"/>
+                    <a:pt x="7090630" y="1511641"/>
                   </a:moveTo>
                   <a:lnTo>
-                    <a:pt x="7019007" y="1525381"/>
-                  </a:lnTo>
-                  <a:lnTo>
-                    <a:pt x="6947385" y="1519365"/>
-                  </a:lnTo>
-                  <a:lnTo>
-                    <a:pt x="6875762" y="1512939"/>
-                  </a:lnTo>
-                  <a:lnTo>
-                    <a:pt x="6804139" y="1506075"/>
-                  </a:lnTo>
-                  <a:lnTo>
-                    <a:pt x="6732517" y="1498744"/>
-                  </a:lnTo>
-                  <a:lnTo>
-                    <a:pt x="6660894" y="1490914"/>
-                  </a:lnTo>
-                  <a:lnTo>
-                    <a:pt x="6589272" y="1482550"/>
-                  </a:lnTo>
-                  <a:lnTo>
-                    <a:pt x="6517649" y="1473617"/>
-                  </a:lnTo>
-                  <a:lnTo>
-                    <a:pt x="6446027" y="1464075"/>
-                  </a:lnTo>
-                  <a:lnTo>
-                    <a:pt x="6374404" y="1453884"/>
-                  </a:lnTo>
-                  <a:lnTo>
-                    <a:pt x="6302782" y="1442998"/>
-                  </a:lnTo>
-                  <a:lnTo>
-                    <a:pt x="6231159" y="1431371"/>
-                  </a:lnTo>
-                  <a:lnTo>
-                    <a:pt x="6159537" y="1418953"/>
-                  </a:lnTo>
-                  <a:lnTo>
-                    <a:pt x="6087914" y="1405688"/>
-                  </a:lnTo>
-                  <a:lnTo>
-                    <a:pt x="6016292" y="1391520"/>
-                  </a:lnTo>
-                  <a:lnTo>
-                    <a:pt x="5944669" y="1376387"/>
-                  </a:lnTo>
-                  <a:lnTo>
-                    <a:pt x="5873047" y="1360224"/>
-                  </a:lnTo>
-                  <a:lnTo>
-                    <a:pt x="5801424" y="1342960"/>
-                  </a:lnTo>
-                  <a:lnTo>
-                    <a:pt x="5729802" y="1324520"/>
-                  </a:lnTo>
-                  <a:lnTo>
-                    <a:pt x="5658179" y="1304824"/>
-                  </a:lnTo>
-                  <a:lnTo>
-                    <a:pt x="5586557" y="1283786"/>
-                  </a:lnTo>
-                  <a:lnTo>
-                    <a:pt x="5514934" y="1261316"/>
-                  </a:lnTo>
-                  <a:lnTo>
-                    <a:pt x="5443311" y="1237316"/>
-                  </a:lnTo>
-                  <a:lnTo>
-                    <a:pt x="5371689" y="1211681"/>
-                  </a:lnTo>
-                  <a:lnTo>
-                    <a:pt x="5300066" y="1184300"/>
-                  </a:lnTo>
-                  <a:lnTo>
-                    <a:pt x="5228444" y="1155055"/>
-                  </a:lnTo>
-                  <a:lnTo>
-                    <a:pt x="5156821" y="1123818"/>
-                  </a:lnTo>
-                  <a:lnTo>
-                    <a:pt x="5085199" y="1090453"/>
-                  </a:lnTo>
-                  <a:lnTo>
-                    <a:pt x="5013576" y="1054816"/>
-                  </a:lnTo>
-                  <a:lnTo>
-                    <a:pt x="4941954" y="1016752"/>
-                  </a:lnTo>
-                  <a:lnTo>
-                    <a:pt x="4870331" y="976095"/>
-                  </a:lnTo>
-                  <a:lnTo>
-                    <a:pt x="4798709" y="932670"/>
-                  </a:lnTo>
-                  <a:lnTo>
-                    <a:pt x="4727086" y="886287"/>
-                  </a:lnTo>
-                  <a:lnTo>
-                    <a:pt x="4655464" y="836745"/>
-                  </a:lnTo>
-                  <a:lnTo>
-                    <a:pt x="4583841" y="784188"/>
-                  </a:lnTo>
-                  <a:lnTo>
-                    <a:pt x="4512219" y="775518"/>
-                  </a:lnTo>
-                  <a:lnTo>
-                    <a:pt x="4440596" y="766757"/>
-                  </a:lnTo>
-                  <a:lnTo>
-                    <a:pt x="4368974" y="757905"/>
-                  </a:lnTo>
-                  <a:lnTo>
-                    <a:pt x="4297351" y="748960"/>
-                  </a:lnTo>
-                  <a:lnTo>
-                    <a:pt x="4225729" y="739922"/>
-                  </a:lnTo>
-                  <a:lnTo>
-                    <a:pt x="4154106" y="730790"/>
-                  </a:lnTo>
-                  <a:lnTo>
-                    <a:pt x="4082483" y="721562"/>
-                  </a:lnTo>
-                  <a:lnTo>
-                    <a:pt x="4010861" y="712237"/>
-                  </a:lnTo>
-                  <a:lnTo>
-                    <a:pt x="3939238" y="702815"/>
-                  </a:lnTo>
-                  <a:lnTo>
-                    <a:pt x="3867616" y="693294"/>
-                  </a:lnTo>
-                  <a:lnTo>
-                    <a:pt x="3795993" y="683674"/>
-                  </a:lnTo>
-                  <a:lnTo>
-                    <a:pt x="3724371" y="673954"/>
-                  </a:lnTo>
-                  <a:lnTo>
-                    <a:pt x="3652748" y="664132"/>
-                  </a:lnTo>
-                  <a:lnTo>
-                    <a:pt x="3581126" y="654207"/>
-                  </a:lnTo>
-                  <a:lnTo>
-                    <a:pt x="3509503" y="644179"/>
-                  </a:lnTo>
-                  <a:lnTo>
-                    <a:pt x="3437881" y="634045"/>
-                  </a:lnTo>
-                  <a:lnTo>
-                    <a:pt x="3366258" y="623806"/>
-                  </a:lnTo>
-                  <a:lnTo>
-                    <a:pt x="3294636" y="613460"/>
-                  </a:lnTo>
-                  <a:lnTo>
-                    <a:pt x="3223013" y="603005"/>
-                  </a:lnTo>
-                  <a:lnTo>
-                    <a:pt x="3151391" y="592442"/>
-                  </a:lnTo>
-                  <a:lnTo>
-                    <a:pt x="3079768" y="581768"/>
-                  </a:lnTo>
-                  <a:lnTo>
-                    <a:pt x="3008146" y="570982"/>
-                  </a:lnTo>
-                  <a:lnTo>
-                    <a:pt x="2936523" y="560084"/>
-                  </a:lnTo>
-                  <a:lnTo>
-                    <a:pt x="2864901" y="549071"/>
-                  </a:lnTo>
-                  <a:lnTo>
-                    <a:pt x="2793278" y="537944"/>
-                  </a:lnTo>
-                  <a:lnTo>
-                    <a:pt x="2721655" y="526700"/>
-                  </a:lnTo>
-                  <a:lnTo>
-                    <a:pt x="2650033" y="515339"/>
-                  </a:lnTo>
-                  <a:lnTo>
-                    <a:pt x="2578410" y="503859"/>
-                  </a:lnTo>
-                  <a:lnTo>
-                    <a:pt x="2506788" y="492259"/>
-                  </a:lnTo>
-                  <a:lnTo>
-                    <a:pt x="2435165" y="480538"/>
-                  </a:lnTo>
-                  <a:lnTo>
-                    <a:pt x="2363543" y="468694"/>
-                  </a:lnTo>
-                  <a:lnTo>
-                    <a:pt x="2291920" y="456727"/>
-                  </a:lnTo>
-                  <a:lnTo>
-                    <a:pt x="2220298" y="444635"/>
-                  </a:lnTo>
-                  <a:lnTo>
-                    <a:pt x="2148675" y="432416"/>
-                  </a:lnTo>
-                  <a:lnTo>
-                    <a:pt x="2077053" y="420069"/>
-                  </a:lnTo>
-                  <a:lnTo>
-                    <a:pt x="2005430" y="407593"/>
-                  </a:lnTo>
-                  <a:lnTo>
-                    <a:pt x="1933808" y="394987"/>
-                  </a:lnTo>
-                  <a:lnTo>
-                    <a:pt x="1862185" y="382249"/>
-                  </a:lnTo>
-                  <a:lnTo>
-                    <a:pt x="1790563" y="369379"/>
-                  </a:lnTo>
-                  <a:lnTo>
-                    <a:pt x="1718940" y="356373"/>
-                  </a:lnTo>
-                  <a:lnTo>
-                    <a:pt x="1647318" y="343232"/>
-                  </a:lnTo>
-                  <a:lnTo>
-                    <a:pt x="1575695" y="329953"/>
-                  </a:lnTo>
-                  <a:lnTo>
-                    <a:pt x="1504073" y="316535"/>
-                  </a:lnTo>
-                  <a:lnTo>
-                    <a:pt x="1432450" y="302978"/>
-                  </a:lnTo>
-                  <a:lnTo>
-                    <a:pt x="1360827" y="289278"/>
-                  </a:lnTo>
-                  <a:lnTo>
-                    <a:pt x="1289205" y="275436"/>
-                  </a:lnTo>
-                  <a:lnTo>
-                    <a:pt x="1217582" y="261448"/>
-                  </a:lnTo>
-                  <a:lnTo>
-                    <a:pt x="1145960" y="247315"/>
-                  </a:lnTo>
-                  <a:lnTo>
-                    <a:pt x="1074337" y="233034"/>
-                  </a:lnTo>
-                  <a:lnTo>
-                    <a:pt x="1002715" y="218603"/>
-                  </a:lnTo>
-                  <a:lnTo>
-                    <a:pt x="931092" y="204022"/>
-                  </a:lnTo>
-                  <a:lnTo>
-                    <a:pt x="859470" y="189288"/>
-                  </a:lnTo>
-                  <a:lnTo>
-                    <a:pt x="787847" y="174400"/>
-                  </a:lnTo>
-                  <a:lnTo>
-                    <a:pt x="716225" y="159357"/>
-                  </a:lnTo>
-                  <a:lnTo>
-                    <a:pt x="644602" y="144156"/>
-                  </a:lnTo>
-                  <a:lnTo>
-                    <a:pt x="572980" y="128797"/>
-                  </a:lnTo>
-                  <a:lnTo>
-                    <a:pt x="501357" y="113277"/>
-                  </a:lnTo>
-                  <a:lnTo>
-                    <a:pt x="429735" y="97595"/>
-                  </a:lnTo>
-                  <a:lnTo>
-                    <a:pt x="358112" y="81749"/>
-                  </a:lnTo>
-                  <a:lnTo>
-                    <a:pt x="286490" y="65737"/>
-                  </a:lnTo>
-                  <a:lnTo>
-                    <a:pt x="214867" y="49558"/>
-                  </a:lnTo>
-                  <a:lnTo>
-                    <a:pt x="143245" y="33210"/>
-                  </a:lnTo>
-                  <a:lnTo>
-                    <a:pt x="71622" y="16691"/>
+                    <a:pt x="7019007" y="1505987"/>
+                  </a:lnTo>
+                  <a:lnTo>
+                    <a:pt x="6947385" y="1499947"/>
+                  </a:lnTo>
+                  <a:lnTo>
+                    <a:pt x="6875762" y="1493497"/>
+                  </a:lnTo>
+                  <a:lnTo>
+                    <a:pt x="6804139" y="1486607"/>
+                  </a:lnTo>
+                  <a:lnTo>
+                    <a:pt x="6732517" y="1479250"/>
+                  </a:lnTo>
+                  <a:lnTo>
+                    <a:pt x="6660894" y="1471391"/>
+                  </a:lnTo>
+                  <a:lnTo>
+                    <a:pt x="6589272" y="1462998"/>
+                  </a:lnTo>
+                  <a:lnTo>
+                    <a:pt x="6517649" y="1454034"/>
+                  </a:lnTo>
+                  <a:lnTo>
+                    <a:pt x="6446027" y="1444460"/>
+                  </a:lnTo>
+                  <a:lnTo>
+                    <a:pt x="6374404" y="1434235"/>
+                  </a:lnTo>
+                  <a:lnTo>
+                    <a:pt x="6302782" y="1423314"/>
+                  </a:lnTo>
+                  <a:lnTo>
+                    <a:pt x="6231159" y="1411650"/>
+                  </a:lnTo>
+                  <a:lnTo>
+                    <a:pt x="6159537" y="1399193"/>
+                  </a:lnTo>
+                  <a:lnTo>
+                    <a:pt x="6087914" y="1385888"/>
+                  </a:lnTo>
+                  <a:lnTo>
+                    <a:pt x="6016292" y="1371678"/>
+                  </a:lnTo>
+                  <a:lnTo>
+                    <a:pt x="5944669" y="1356502"/>
+                  </a:lnTo>
+                  <a:lnTo>
+                    <a:pt x="5873047" y="1340293"/>
+                  </a:lnTo>
+                  <a:lnTo>
+                    <a:pt x="5801424" y="1322981"/>
+                  </a:lnTo>
+                  <a:lnTo>
+                    <a:pt x="5729802" y="1304491"/>
+                  </a:lnTo>
+                  <a:lnTo>
+                    <a:pt x="5658179" y="1284744"/>
+                  </a:lnTo>
+                  <a:lnTo>
+                    <a:pt x="5586557" y="1263653"/>
+                  </a:lnTo>
+                  <a:lnTo>
+                    <a:pt x="5514934" y="1241127"/>
+                  </a:lnTo>
+                  <a:lnTo>
+                    <a:pt x="5443311" y="1217069"/>
+                  </a:lnTo>
+                  <a:lnTo>
+                    <a:pt x="5371689" y="1191374"/>
+                  </a:lnTo>
+                  <a:lnTo>
+                    <a:pt x="5300066" y="1163931"/>
+                  </a:lnTo>
+                  <a:lnTo>
+                    <a:pt x="5228444" y="1134621"/>
+                  </a:lnTo>
+                  <a:lnTo>
+                    <a:pt x="5156821" y="1103317"/>
+                  </a:lnTo>
+                  <a:lnTo>
+                    <a:pt x="5085199" y="1069883"/>
+                  </a:lnTo>
+                  <a:lnTo>
+                    <a:pt x="5013576" y="1034175"/>
+                  </a:lnTo>
+                  <a:lnTo>
+                    <a:pt x="4941954" y="996038"/>
+                  </a:lnTo>
+                  <a:lnTo>
+                    <a:pt x="4870331" y="955306"/>
+                  </a:lnTo>
+                  <a:lnTo>
+                    <a:pt x="4798709" y="911803"/>
+                  </a:lnTo>
+                  <a:lnTo>
+                    <a:pt x="4727086" y="865341"/>
+                  </a:lnTo>
+                  <a:lnTo>
+                    <a:pt x="4655464" y="815717"/>
+                  </a:lnTo>
+                  <a:lnTo>
+                    <a:pt x="4583841" y="764899"/>
+                  </a:lnTo>
+                  <a:lnTo>
+                    <a:pt x="4512219" y="756385"/>
+                  </a:lnTo>
+                  <a:lnTo>
+                    <a:pt x="4440596" y="747785"/>
+                  </a:lnTo>
+                  <a:lnTo>
+                    <a:pt x="4368974" y="739096"/>
+                  </a:lnTo>
+                  <a:lnTo>
+                    <a:pt x="4297351" y="730317"/>
+                  </a:lnTo>
+                  <a:lnTo>
+                    <a:pt x="4225729" y="721449"/>
+                  </a:lnTo>
+                  <a:lnTo>
+                    <a:pt x="4154106" y="712490"/>
+                  </a:lnTo>
+                  <a:lnTo>
+                    <a:pt x="4082483" y="703439"/>
+                  </a:lnTo>
+                  <a:lnTo>
+                    <a:pt x="4010861" y="694295"/>
+                  </a:lnTo>
+                  <a:lnTo>
+                    <a:pt x="3939238" y="685057"/>
+                  </a:lnTo>
+                  <a:lnTo>
+                    <a:pt x="3867616" y="675725"/>
+                  </a:lnTo>
+                  <a:lnTo>
+                    <a:pt x="3795993" y="666297"/>
+                  </a:lnTo>
+                  <a:lnTo>
+                    <a:pt x="3724371" y="656772"/>
+                  </a:lnTo>
+                  <a:lnTo>
+                    <a:pt x="3652748" y="647149"/>
+                  </a:lnTo>
+                  <a:lnTo>
+                    <a:pt x="3581126" y="637428"/>
+                  </a:lnTo>
+                  <a:lnTo>
+                    <a:pt x="3509503" y="627607"/>
+                  </a:lnTo>
+                  <a:lnTo>
+                    <a:pt x="3437881" y="617685"/>
+                  </a:lnTo>
+                  <a:lnTo>
+                    <a:pt x="3366258" y="607661"/>
+                  </a:lnTo>
+                  <a:lnTo>
+                    <a:pt x="3294636" y="597535"/>
+                  </a:lnTo>
+                  <a:lnTo>
+                    <a:pt x="3223013" y="587304"/>
+                  </a:lnTo>
+                  <a:lnTo>
+                    <a:pt x="3151391" y="576969"/>
+                  </a:lnTo>
+                  <a:lnTo>
+                    <a:pt x="3079768" y="566528"/>
+                  </a:lnTo>
+                  <a:lnTo>
+                    <a:pt x="3008146" y="555979"/>
+                  </a:lnTo>
+                  <a:lnTo>
+                    <a:pt x="2936523" y="545322"/>
+                  </a:lnTo>
+                  <a:lnTo>
+                    <a:pt x="2864901" y="534556"/>
+                  </a:lnTo>
+                  <a:lnTo>
+                    <a:pt x="2793278" y="523680"/>
+                  </a:lnTo>
+                  <a:lnTo>
+                    <a:pt x="2721655" y="512692"/>
+                  </a:lnTo>
+                  <a:lnTo>
+                    <a:pt x="2650033" y="501591"/>
+                  </a:lnTo>
+                  <a:lnTo>
+                    <a:pt x="2578410" y="490377"/>
+                  </a:lnTo>
+                  <a:lnTo>
+                    <a:pt x="2506788" y="479047"/>
+                  </a:lnTo>
+                  <a:lnTo>
+                    <a:pt x="2435165" y="467601"/>
+                  </a:lnTo>
+                  <a:lnTo>
+                    <a:pt x="2363543" y="456038"/>
+                  </a:lnTo>
+                  <a:lnTo>
+                    <a:pt x="2291920" y="444356"/>
+                  </a:lnTo>
+                  <a:lnTo>
+                    <a:pt x="2220298" y="432554"/>
+                  </a:lnTo>
+                  <a:lnTo>
+                    <a:pt x="2148675" y="420631"/>
+                  </a:lnTo>
+                  <a:lnTo>
+                    <a:pt x="2077053" y="408586"/>
+                  </a:lnTo>
+                  <a:lnTo>
+                    <a:pt x="2005430" y="396417"/>
+                  </a:lnTo>
+                  <a:lnTo>
+                    <a:pt x="1933808" y="384123"/>
+                  </a:lnTo>
+                  <a:lnTo>
+                    <a:pt x="1862185" y="371704"/>
+                  </a:lnTo>
+                  <a:lnTo>
+                    <a:pt x="1790563" y="359157"/>
+                  </a:lnTo>
+                  <a:lnTo>
+                    <a:pt x="1718940" y="346481"/>
+                  </a:lnTo>
+                  <a:lnTo>
+                    <a:pt x="1647318" y="333675"/>
+                  </a:lnTo>
+                  <a:lnTo>
+                    <a:pt x="1575695" y="320738"/>
+                  </a:lnTo>
+                  <a:lnTo>
+                    <a:pt x="1504073" y="307668"/>
+                  </a:lnTo>
+                  <a:lnTo>
+                    <a:pt x="1432450" y="294464"/>
+                  </a:lnTo>
+                  <a:lnTo>
+                    <a:pt x="1360827" y="281124"/>
+                  </a:lnTo>
+                  <a:lnTo>
+                    <a:pt x="1289205" y="267648"/>
+                  </a:lnTo>
+                  <a:lnTo>
+                    <a:pt x="1217582" y="254033"/>
+                  </a:lnTo>
+                  <a:lnTo>
+                    <a:pt x="1145960" y="240279"/>
+                  </a:lnTo>
+                  <a:lnTo>
+                    <a:pt x="1074337" y="226383"/>
+                  </a:lnTo>
+                  <a:lnTo>
+                    <a:pt x="1002715" y="212345"/>
+                  </a:lnTo>
+                  <a:lnTo>
+                    <a:pt x="931092" y="198163"/>
+                  </a:lnTo>
+                  <a:lnTo>
+                    <a:pt x="859470" y="183836"/>
+                  </a:lnTo>
+                  <a:lnTo>
+                    <a:pt x="787847" y="169362"/>
+                  </a:lnTo>
+                  <a:lnTo>
+                    <a:pt x="716225" y="154739"/>
+                  </a:lnTo>
+                  <a:lnTo>
+                    <a:pt x="644602" y="139966"/>
+                  </a:lnTo>
+                  <a:lnTo>
+                    <a:pt x="572980" y="125041"/>
+                  </a:lnTo>
+                  <a:lnTo>
+                    <a:pt x="501357" y="109964"/>
+                  </a:lnTo>
+                  <a:lnTo>
+                    <a:pt x="429735" y="94731"/>
+                  </a:lnTo>
+                  <a:lnTo>
+                    <a:pt x="358112" y="79343"/>
+                  </a:lnTo>
+                  <a:lnTo>
+                    <a:pt x="286490" y="63796"/>
+                  </a:lnTo>
+                  <a:lnTo>
+                    <a:pt x="214867" y="48091"/>
+                  </a:lnTo>
+                  <a:lnTo>
+                    <a:pt x="143245" y="32224"/>
+                  </a:lnTo>
+                  <a:lnTo>
+                    <a:pt x="71622" y="16194"/>
                   </a:lnTo>
                   <a:lnTo>
                     <a:pt x="0" y="0"/>
@@ -3948,234 +3948,234 @@
           </p:nvSpPr>
           <p:spPr>
             <a:xfrm>
-              <a:off x="3061973" y="2073503"/>
-              <a:ext cx="5200706" cy="3265393"/>
+              <a:off x="3055538" y="2073503"/>
+              <a:ext cx="5207141" cy="3264069"/>
             </a:xfrm>
             <a:custGeom>
               <a:avLst/>
               <a:pathLst>
-                <a:path w="5200706" h="3265393">
+                <a:path w="5207141" h="3264069">
                   <a:moveTo>
                     <a:pt x="0" y="0"/>
                   </a:moveTo>
                   <a:lnTo>
-                    <a:pt x="43884" y="81057"/>
-                  </a:lnTo>
-                  <a:lnTo>
-                    <a:pt x="115506" y="208398"/>
-                  </a:lnTo>
-                  <a:lnTo>
-                    <a:pt x="187129" y="330973"/>
-                  </a:lnTo>
-                  <a:lnTo>
-                    <a:pt x="258752" y="448961"/>
-                  </a:lnTo>
-                  <a:lnTo>
-                    <a:pt x="330374" y="562533"/>
-                  </a:lnTo>
-                  <a:lnTo>
-                    <a:pt x="401997" y="671855"/>
-                  </a:lnTo>
-                  <a:lnTo>
-                    <a:pt x="473619" y="777086"/>
-                  </a:lnTo>
-                  <a:lnTo>
-                    <a:pt x="545242" y="878379"/>
-                  </a:lnTo>
-                  <a:lnTo>
-                    <a:pt x="616864" y="975881"/>
-                  </a:lnTo>
-                  <a:lnTo>
-                    <a:pt x="688487" y="1069734"/>
-                  </a:lnTo>
-                  <a:lnTo>
-                    <a:pt x="760109" y="1160075"/>
-                  </a:lnTo>
-                  <a:lnTo>
-                    <a:pt x="831732" y="1247035"/>
-                  </a:lnTo>
-                  <a:lnTo>
-                    <a:pt x="903354" y="1330740"/>
-                  </a:lnTo>
-                  <a:lnTo>
-                    <a:pt x="974977" y="1411314"/>
-                  </a:lnTo>
-                  <a:lnTo>
-                    <a:pt x="1046599" y="1488871"/>
-                  </a:lnTo>
-                  <a:lnTo>
-                    <a:pt x="1118222" y="1563527"/>
-                  </a:lnTo>
-                  <a:lnTo>
-                    <a:pt x="1189844" y="1635388"/>
-                  </a:lnTo>
-                  <a:lnTo>
-                    <a:pt x="1261467" y="1704560"/>
-                  </a:lnTo>
-                  <a:lnTo>
-                    <a:pt x="1333089" y="1771144"/>
-                  </a:lnTo>
-                  <a:lnTo>
-                    <a:pt x="1404712" y="1835235"/>
-                  </a:lnTo>
-                  <a:lnTo>
-                    <a:pt x="1476334" y="1896928"/>
-                  </a:lnTo>
-                  <a:lnTo>
-                    <a:pt x="1547957" y="1956313"/>
-                  </a:lnTo>
-                  <a:lnTo>
-                    <a:pt x="1619580" y="2013475"/>
-                  </a:lnTo>
-                  <a:lnTo>
-                    <a:pt x="1691202" y="2068497"/>
-                  </a:lnTo>
-                  <a:lnTo>
-                    <a:pt x="1762825" y="2121461"/>
-                  </a:lnTo>
-                  <a:lnTo>
-                    <a:pt x="1834447" y="2172442"/>
-                  </a:lnTo>
-                  <a:lnTo>
-                    <a:pt x="1906070" y="2221516"/>
-                  </a:lnTo>
-                  <a:lnTo>
-                    <a:pt x="1977692" y="2268753"/>
-                  </a:lnTo>
-                  <a:lnTo>
-                    <a:pt x="2049315" y="2314223"/>
-                  </a:lnTo>
-                  <a:lnTo>
-                    <a:pt x="2120937" y="2357990"/>
-                  </a:lnTo>
-                  <a:lnTo>
-                    <a:pt x="2192560" y="2400120"/>
-                  </a:lnTo>
-                  <a:lnTo>
-                    <a:pt x="2264182" y="2440673"/>
-                  </a:lnTo>
-                  <a:lnTo>
-                    <a:pt x="2335805" y="2479709"/>
-                  </a:lnTo>
-                  <a:lnTo>
-                    <a:pt x="2407427" y="2517283"/>
-                  </a:lnTo>
-                  <a:lnTo>
-                    <a:pt x="2479050" y="2553452"/>
-                  </a:lnTo>
-                  <a:lnTo>
-                    <a:pt x="2550672" y="2588267"/>
-                  </a:lnTo>
-                  <a:lnTo>
-                    <a:pt x="2622295" y="2621779"/>
-                  </a:lnTo>
-                  <a:lnTo>
-                    <a:pt x="2693917" y="2654037"/>
-                  </a:lnTo>
-                  <a:lnTo>
-                    <a:pt x="2765540" y="2685087"/>
-                  </a:lnTo>
-                  <a:lnTo>
-                    <a:pt x="2837162" y="2714976"/>
-                  </a:lnTo>
-                  <a:lnTo>
-                    <a:pt x="2908785" y="2743746"/>
-                  </a:lnTo>
-                  <a:lnTo>
-                    <a:pt x="2980408" y="2771439"/>
-                  </a:lnTo>
-                  <a:lnTo>
-                    <a:pt x="3052030" y="2798096"/>
-                  </a:lnTo>
-                  <a:lnTo>
-                    <a:pt x="3123653" y="2823756"/>
-                  </a:lnTo>
-                  <a:lnTo>
-                    <a:pt x="3195275" y="2848455"/>
-                  </a:lnTo>
-                  <a:lnTo>
-                    <a:pt x="3266898" y="2872230"/>
-                  </a:lnTo>
-                  <a:lnTo>
-                    <a:pt x="3338520" y="2895115"/>
-                  </a:lnTo>
-                  <a:lnTo>
-                    <a:pt x="3410143" y="2917144"/>
-                  </a:lnTo>
-                  <a:lnTo>
-                    <a:pt x="3481765" y="2938348"/>
-                  </a:lnTo>
-                  <a:lnTo>
-                    <a:pt x="3553388" y="2958759"/>
-                  </a:lnTo>
-                  <a:lnTo>
-                    <a:pt x="3625010" y="2978406"/>
-                  </a:lnTo>
-                  <a:lnTo>
-                    <a:pt x="3696633" y="2997317"/>
-                  </a:lnTo>
-                  <a:lnTo>
-                    <a:pt x="3768255" y="3015521"/>
-                  </a:lnTo>
-                  <a:lnTo>
-                    <a:pt x="3839878" y="3033044"/>
-                  </a:lnTo>
-                  <a:lnTo>
-                    <a:pt x="3911500" y="3049911"/>
-                  </a:lnTo>
-                  <a:lnTo>
-                    <a:pt x="3983123" y="3066146"/>
-                  </a:lnTo>
-                  <a:lnTo>
-                    <a:pt x="4054745" y="3081774"/>
-                  </a:lnTo>
-                  <a:lnTo>
-                    <a:pt x="4126368" y="3096818"/>
-                  </a:lnTo>
-                  <a:lnTo>
-                    <a:pt x="4197990" y="3111298"/>
-                  </a:lnTo>
-                  <a:lnTo>
-                    <a:pt x="4269613" y="3125236"/>
-                  </a:lnTo>
-                  <a:lnTo>
-                    <a:pt x="4341236" y="3138653"/>
-                  </a:lnTo>
-                  <a:lnTo>
-                    <a:pt x="4412858" y="3151567"/>
-                  </a:lnTo>
-                  <a:lnTo>
-                    <a:pt x="4484481" y="3163999"/>
-                  </a:lnTo>
-                  <a:lnTo>
-                    <a:pt x="4556103" y="3175965"/>
-                  </a:lnTo>
-                  <a:lnTo>
-                    <a:pt x="4627726" y="3187483"/>
-                  </a:lnTo>
-                  <a:lnTo>
-                    <a:pt x="4699348" y="3198570"/>
-                  </a:lnTo>
-                  <a:lnTo>
-                    <a:pt x="4770971" y="3209243"/>
-                  </a:lnTo>
-                  <a:lnTo>
-                    <a:pt x="4842593" y="3219516"/>
-                  </a:lnTo>
-                  <a:lnTo>
-                    <a:pt x="4914216" y="3229404"/>
-                  </a:lnTo>
-                  <a:lnTo>
-                    <a:pt x="4985838" y="3238922"/>
-                  </a:lnTo>
-                  <a:lnTo>
-                    <a:pt x="5057461" y="3248085"/>
-                  </a:lnTo>
-                  <a:lnTo>
-                    <a:pt x="5129083" y="3256904"/>
-                  </a:lnTo>
-                  <a:lnTo>
-                    <a:pt x="5200706" y="3265393"/>
+                    <a:pt x="50319" y="92313"/>
+                  </a:lnTo>
+                  <a:lnTo>
+                    <a:pt x="121941" y="218808"/>
+                  </a:lnTo>
+                  <a:lnTo>
+                    <a:pt x="193564" y="340585"/>
+                  </a:lnTo>
+                  <a:lnTo>
+                    <a:pt x="265186" y="457820"/>
+                  </a:lnTo>
+                  <a:lnTo>
+                    <a:pt x="336809" y="570682"/>
+                  </a:lnTo>
+                  <a:lnTo>
+                    <a:pt x="408432" y="679335"/>
+                  </a:lnTo>
+                  <a:lnTo>
+                    <a:pt x="480054" y="783935"/>
+                  </a:lnTo>
+                  <a:lnTo>
+                    <a:pt x="551677" y="884633"/>
+                  </a:lnTo>
+                  <a:lnTo>
+                    <a:pt x="623299" y="981576"/>
+                  </a:lnTo>
+                  <a:lnTo>
+                    <a:pt x="694922" y="1074903"/>
+                  </a:lnTo>
+                  <a:lnTo>
+                    <a:pt x="766544" y="1164749"/>
+                  </a:lnTo>
+                  <a:lnTo>
+                    <a:pt x="838167" y="1251244"/>
+                  </a:lnTo>
+                  <a:lnTo>
+                    <a:pt x="909789" y="1334512"/>
+                  </a:lnTo>
+                  <a:lnTo>
+                    <a:pt x="981412" y="1414675"/>
+                  </a:lnTo>
+                  <a:lnTo>
+                    <a:pt x="1053034" y="1491848"/>
+                  </a:lnTo>
+                  <a:lnTo>
+                    <a:pt x="1124657" y="1566143"/>
+                  </a:lnTo>
+                  <a:lnTo>
+                    <a:pt x="1196279" y="1637666"/>
+                  </a:lnTo>
+                  <a:lnTo>
+                    <a:pt x="1267902" y="1706522"/>
+                  </a:lnTo>
+                  <a:lnTo>
+                    <a:pt x="1339524" y="1772810"/>
+                  </a:lnTo>
+                  <a:lnTo>
+                    <a:pt x="1411147" y="1836625"/>
+                  </a:lnTo>
+                  <a:lnTo>
+                    <a:pt x="1482769" y="1898060"/>
+                  </a:lnTo>
+                  <a:lnTo>
+                    <a:pt x="1554392" y="1957203"/>
+                  </a:lnTo>
+                  <a:lnTo>
+                    <a:pt x="1626014" y="2014141"/>
+                  </a:lnTo>
+                  <a:lnTo>
+                    <a:pt x="1697637" y="2068955"/>
+                  </a:lnTo>
+                  <a:lnTo>
+                    <a:pt x="1769260" y="2121724"/>
+                  </a:lnTo>
+                  <a:lnTo>
+                    <a:pt x="1840882" y="2172525"/>
+                  </a:lnTo>
+                  <a:lnTo>
+                    <a:pt x="1912505" y="2221432"/>
+                  </a:lnTo>
+                  <a:lnTo>
+                    <a:pt x="1984127" y="2268514"/>
+                  </a:lnTo>
+                  <a:lnTo>
+                    <a:pt x="2055750" y="2313840"/>
+                  </a:lnTo>
+                  <a:lnTo>
+                    <a:pt x="2127372" y="2357476"/>
+                  </a:lnTo>
+                  <a:lnTo>
+                    <a:pt x="2198995" y="2399484"/>
+                  </a:lnTo>
+                  <a:lnTo>
+                    <a:pt x="2270617" y="2439925"/>
+                  </a:lnTo>
+                  <a:lnTo>
+                    <a:pt x="2342240" y="2478858"/>
+                  </a:lnTo>
+                  <a:lnTo>
+                    <a:pt x="2413862" y="2516339"/>
+                  </a:lnTo>
+                  <a:lnTo>
+                    <a:pt x="2485485" y="2552421"/>
+                  </a:lnTo>
+                  <a:lnTo>
+                    <a:pt x="2557107" y="2587158"/>
+                  </a:lnTo>
+                  <a:lnTo>
+                    <a:pt x="2628730" y="2620600"/>
+                  </a:lnTo>
+                  <a:lnTo>
+                    <a:pt x="2700352" y="2652794"/>
+                  </a:lnTo>
+                  <a:lnTo>
+                    <a:pt x="2771975" y="2683787"/>
+                  </a:lnTo>
+                  <a:lnTo>
+                    <a:pt x="2843597" y="2713624"/>
+                  </a:lnTo>
+                  <a:lnTo>
+                    <a:pt x="2915220" y="2742348"/>
+                  </a:lnTo>
+                  <a:lnTo>
+                    <a:pt x="2986842" y="2770001"/>
+                  </a:lnTo>
+                  <a:lnTo>
+                    <a:pt x="3058465" y="2796623"/>
+                  </a:lnTo>
+                  <a:lnTo>
+                    <a:pt x="3130088" y="2822251"/>
+                  </a:lnTo>
+                  <a:lnTo>
+                    <a:pt x="3201710" y="2846924"/>
+                  </a:lnTo>
+                  <a:lnTo>
+                    <a:pt x="3273333" y="2870676"/>
+                  </a:lnTo>
+                  <a:lnTo>
+                    <a:pt x="3344955" y="2893543"/>
+                  </a:lnTo>
+                  <a:lnTo>
+                    <a:pt x="3416578" y="2915557"/>
+                  </a:lnTo>
+                  <a:lnTo>
+                    <a:pt x="3488200" y="2936749"/>
+                  </a:lnTo>
+                  <a:lnTo>
+                    <a:pt x="3559823" y="2957151"/>
+                  </a:lnTo>
+                  <a:lnTo>
+                    <a:pt x="3631445" y="2976792"/>
+                  </a:lnTo>
+                  <a:lnTo>
+                    <a:pt x="3703068" y="2995701"/>
+                  </a:lnTo>
+                  <a:lnTo>
+                    <a:pt x="3774690" y="3013904"/>
+                  </a:lnTo>
+                  <a:lnTo>
+                    <a:pt x="3846313" y="3031429"/>
+                  </a:lnTo>
+                  <a:lnTo>
+                    <a:pt x="3917935" y="3048299"/>
+                  </a:lnTo>
+                  <a:lnTo>
+                    <a:pt x="3989558" y="3064541"/>
+                  </a:lnTo>
+                  <a:lnTo>
+                    <a:pt x="4061180" y="3080176"/>
+                  </a:lnTo>
+                  <a:lnTo>
+                    <a:pt x="4132803" y="3095229"/>
+                  </a:lnTo>
+                  <a:lnTo>
+                    <a:pt x="4204425" y="3109720"/>
+                  </a:lnTo>
+                  <a:lnTo>
+                    <a:pt x="4276048" y="3123671"/>
+                  </a:lnTo>
+                  <a:lnTo>
+                    <a:pt x="4347670" y="3137101"/>
+                  </a:lnTo>
+                  <a:lnTo>
+                    <a:pt x="4419293" y="3150030"/>
+                  </a:lnTo>
+                  <a:lnTo>
+                    <a:pt x="4490916" y="3162477"/>
+                  </a:lnTo>
+                  <a:lnTo>
+                    <a:pt x="4562538" y="3174460"/>
+                  </a:lnTo>
+                  <a:lnTo>
+                    <a:pt x="4634161" y="3185996"/>
+                  </a:lnTo>
+                  <a:lnTo>
+                    <a:pt x="4705783" y="3197102"/>
+                  </a:lnTo>
+                  <a:lnTo>
+                    <a:pt x="4777406" y="3207793"/>
+                  </a:lnTo>
+                  <a:lnTo>
+                    <a:pt x="4849028" y="3218086"/>
+                  </a:lnTo>
+                  <a:lnTo>
+                    <a:pt x="4920651" y="3227994"/>
+                  </a:lnTo>
+                  <a:lnTo>
+                    <a:pt x="4992273" y="3237533"/>
+                  </a:lnTo>
+                  <a:lnTo>
+                    <a:pt x="5063896" y="3246717"/>
+                  </a:lnTo>
+                  <a:lnTo>
+                    <a:pt x="5135518" y="3255558"/>
+                  </a:lnTo>
+                  <a:lnTo>
+                    <a:pt x="5207141" y="3264069"/>
                   </a:lnTo>
                 </a:path>
               </a:pathLst>
@@ -4247,7 +4247,7 @@
           </p:nvSpPr>
           <p:spPr>
             <a:xfrm>
-              <a:off x="5756448" y="2073503"/>
+              <a:off x="5759271" y="2073503"/>
               <a:ext cx="0" cy="3649639"/>
             </a:xfrm>
             <a:custGeom>
@@ -4290,7 +4290,7 @@
           </p:nvSpPr>
           <p:spPr>
             <a:xfrm>
-              <a:off x="4469314" y="2073503"/>
+              <a:off x="4504692" y="2073503"/>
               <a:ext cx="0" cy="3649639"/>
             </a:xfrm>
             <a:custGeom>
@@ -4333,7 +4333,7 @@
           </p:nvSpPr>
           <p:spPr>
             <a:xfrm>
-              <a:off x="6872676" y="2073503"/>
+              <a:off x="6871070" y="2073503"/>
               <a:ext cx="0" cy="3649639"/>
             </a:xfrm>
             <a:custGeom>
@@ -4606,7 +4606,7 @@
           </p:nvSpPr>
           <p:spPr>
             <a:xfrm>
-              <a:off x="3199861" y="5785772"/>
+              <a:off x="3201825" y="5785772"/>
               <a:ext cx="161574" cy="80101"/>
             </a:xfrm>
             <a:prstGeom prst="rect">
@@ -4652,7 +4652,7 @@
           </p:nvSpPr>
           <p:spPr>
             <a:xfrm>
-              <a:off x="5730225" y="5785772"/>
+              <a:off x="5727471" y="5785772"/>
               <a:ext cx="62179" cy="80101"/>
             </a:xfrm>
             <a:prstGeom prst="rect">
@@ -4698,7 +4698,7 @@
           </p:nvSpPr>
           <p:spPr>
             <a:xfrm>
-              <a:off x="8179802" y="5785772"/>
+              <a:off x="8172329" y="5785772"/>
               <a:ext cx="124358" cy="80101"/>
             </a:xfrm>
             <a:prstGeom prst="rect">
@@ -4869,7 +4869,7 @@
                   <a:latin typeface="Helvetica"/>
                   <a:cs typeface="Helvetica"/>
                 </a:rPr>
-                <a:t>subHR per 10 mL/min decline: 1.70 (1.15-2.49), p_Bonf = 0.042 (n = 6)  |  per IQR decline (Δ = 24.2): 3.60 (1.42-9.12)  |  IQR: [-13.0, 11.2]</a:t>
+                <a:t>subHR per 10 mL/min decline: 1.69 (1.15-2.48), p_Bonf = 0.044 (n = 6)  |  per IQR decline (Δ = 23.9): 3.51 (1.40-8.80)  |  IQR: [-12.7, 11.2]</a:t>
               </a:r>
             </a:p>
           </p:txBody>
